--- a/01_FoundationProjects/MFL08_Servo_Control_Rotary_Encoder/MFL08_Servo_Control_Rotary_Encoder.pptx
+++ b/01_FoundationProjects/MFL08_Servo_Control_Rotary_Encoder/MFL08_Servo_Control_Rotary_Encoder.pptx
@@ -265,7 +265,7 @@
           <a:p>
             <a:fld id="{375049E3-AEF5-412D-9F98-5201579F9569}" type="datetimeFigureOut">
               <a:rPr lang="en-GB" smtClean="0"/>
-              <a:t>26/12/2025</a:t>
+              <a:t>18/01/2026</a:t>
             </a:fld>
             <a:endParaRPr lang="en-GB"/>
           </a:p>
@@ -465,7 +465,7 @@
           <a:p>
             <a:fld id="{375049E3-AEF5-412D-9F98-5201579F9569}" type="datetimeFigureOut">
               <a:rPr lang="en-GB" smtClean="0"/>
-              <a:t>26/12/2025</a:t>
+              <a:t>18/01/2026</a:t>
             </a:fld>
             <a:endParaRPr lang="en-GB"/>
           </a:p>
@@ -675,7 +675,7 @@
           <a:p>
             <a:fld id="{375049E3-AEF5-412D-9F98-5201579F9569}" type="datetimeFigureOut">
               <a:rPr lang="en-GB" smtClean="0"/>
-              <a:t>26/12/2025</a:t>
+              <a:t>18/01/2026</a:t>
             </a:fld>
             <a:endParaRPr lang="en-GB"/>
           </a:p>
@@ -875,7 +875,7 @@
           <a:p>
             <a:fld id="{375049E3-AEF5-412D-9F98-5201579F9569}" type="datetimeFigureOut">
               <a:rPr lang="en-GB" smtClean="0"/>
-              <a:t>26/12/2025</a:t>
+              <a:t>18/01/2026</a:t>
             </a:fld>
             <a:endParaRPr lang="en-GB"/>
           </a:p>
@@ -1151,7 +1151,7 @@
           <a:p>
             <a:fld id="{375049E3-AEF5-412D-9F98-5201579F9569}" type="datetimeFigureOut">
               <a:rPr lang="en-GB" smtClean="0"/>
-              <a:t>26/12/2025</a:t>
+              <a:t>18/01/2026</a:t>
             </a:fld>
             <a:endParaRPr lang="en-GB"/>
           </a:p>
@@ -1419,7 +1419,7 @@
           <a:p>
             <a:fld id="{375049E3-AEF5-412D-9F98-5201579F9569}" type="datetimeFigureOut">
               <a:rPr lang="en-GB" smtClean="0"/>
-              <a:t>26/12/2025</a:t>
+              <a:t>18/01/2026</a:t>
             </a:fld>
             <a:endParaRPr lang="en-GB"/>
           </a:p>
@@ -1834,7 +1834,7 @@
           <a:p>
             <a:fld id="{375049E3-AEF5-412D-9F98-5201579F9569}" type="datetimeFigureOut">
               <a:rPr lang="en-GB" smtClean="0"/>
-              <a:t>26/12/2025</a:t>
+              <a:t>18/01/2026</a:t>
             </a:fld>
             <a:endParaRPr lang="en-GB"/>
           </a:p>
@@ -1976,7 +1976,7 @@
           <a:p>
             <a:fld id="{375049E3-AEF5-412D-9F98-5201579F9569}" type="datetimeFigureOut">
               <a:rPr lang="en-GB" smtClean="0"/>
-              <a:t>26/12/2025</a:t>
+              <a:t>18/01/2026</a:t>
             </a:fld>
             <a:endParaRPr lang="en-GB"/>
           </a:p>
@@ -2089,7 +2089,7 @@
           <a:p>
             <a:fld id="{375049E3-AEF5-412D-9F98-5201579F9569}" type="datetimeFigureOut">
               <a:rPr lang="en-GB" smtClean="0"/>
-              <a:t>26/12/2025</a:t>
+              <a:t>18/01/2026</a:t>
             </a:fld>
             <a:endParaRPr lang="en-GB"/>
           </a:p>
@@ -2402,7 +2402,7 @@
           <a:p>
             <a:fld id="{375049E3-AEF5-412D-9F98-5201579F9569}" type="datetimeFigureOut">
               <a:rPr lang="en-GB" smtClean="0"/>
-              <a:t>26/12/2025</a:t>
+              <a:t>18/01/2026</a:t>
             </a:fld>
             <a:endParaRPr lang="en-GB"/>
           </a:p>
@@ -2691,7 +2691,7 @@
           <a:p>
             <a:fld id="{375049E3-AEF5-412D-9F98-5201579F9569}" type="datetimeFigureOut">
               <a:rPr lang="en-GB" smtClean="0"/>
-              <a:t>26/12/2025</a:t>
+              <a:t>18/01/2026</a:t>
             </a:fld>
             <a:endParaRPr lang="en-GB"/>
           </a:p>
@@ -2934,7 +2934,7 @@
           <a:p>
             <a:fld id="{375049E3-AEF5-412D-9F98-5201579F9569}" type="datetimeFigureOut">
               <a:rPr lang="en-GB" smtClean="0"/>
-              <a:t>26/12/2025</a:t>
+              <a:t>18/01/2026</a:t>
             </a:fld>
             <a:endParaRPr lang="en-GB"/>
           </a:p>
@@ -4061,7 +4061,7 @@
         <p:spPr>
           <a:xfrm>
             <a:off x="7031990" y="2445206"/>
-            <a:ext cx="4309253" cy="1200329"/>
+            <a:ext cx="4309253" cy="1477328"/>
           </a:xfrm>
           <a:prstGeom prst="rect">
             <a:avLst/>
@@ -4085,7 +4085,7 @@
               <a:rPr lang="en-GB" dirty="0">
                 <a:hlinkClick r:id="rId2"/>
               </a:rPr>
-              <a:t>https://github.com/info-zas/zas-robotics-motion/blob/main/01_FoundationProjects/MFL08/MFL08/MFL08.ino</a:t>
+              <a:t>https://github.com/info-zas/zas-robotics-motion/tree/main/01_FoundationProjects/MFL08_Servo_Control_Rotary_Encoder/MFL08_Servo_Control_Rotary_Encoder</a:t>
             </a:r>
             <a:endParaRPr lang="en-GB" dirty="0"/>
           </a:p>
@@ -4201,8 +4201,8 @@
         </p:nvSpPr>
         <p:spPr bwMode="auto">
           <a:xfrm>
-            <a:off x="6943591" y="1938100"/>
-            <a:ext cx="4157028" cy="369332"/>
+            <a:off x="6657343" y="1690688"/>
+            <a:ext cx="4683900" cy="646331"/>
           </a:xfrm>
           <a:prstGeom prst="rect">
             <a:avLst/>
@@ -4314,7 +4314,7 @@
             </a:pPr>
             <a:r>
               <a:rPr lang="en-GB" b="1" dirty="0"/>
-              <a:t>Code for Lesson MFL08 (MFL08.ino):</a:t>
+              <a:t>Code for Lesson MFL08 (MFL08_Servo_Control_Rotary_Encoder.ino):</a:t>
             </a:r>
           </a:p>
         </p:txBody>
@@ -4600,7 +4600,7 @@
           <a:p>
             <a:r>
               <a:rPr lang="en-GB" sz="1800" b="1" dirty="0"/>
-              <a:t>Execute the code (MFL08.ino) in the motion creative board</a:t>
+              <a:t>Execute the code in the motion creative board</a:t>
             </a:r>
           </a:p>
         </p:txBody>
@@ -4912,10 +4912,10 @@
       </p:sp>
       <p:sp>
         <p:nvSpPr>
-          <p:cNvPr id="3" name="TextBox 2">
-            <a:extLst>
-              <a:ext uri="{FF2B5EF4-FFF2-40B4-BE49-F238E27FC236}">
-                <a16:creationId xmlns:a16="http://schemas.microsoft.com/office/drawing/2014/main" id="{39E1AB29-4295-A0E9-1C50-1689A41787AB}"/>
+          <p:cNvPr id="8" name="TextBox 7">
+            <a:extLst>
+              <a:ext uri="{FF2B5EF4-FFF2-40B4-BE49-F238E27FC236}">
+                <a16:creationId xmlns:a16="http://schemas.microsoft.com/office/drawing/2014/main" id="{CAB74F5E-338E-7529-F1E5-6EEC1A538B71}"/>
               </a:ext>
             </a:extLst>
           </p:cNvPr>
@@ -4924,8 +4924,8 @@
         </p:nvSpPr>
         <p:spPr>
           <a:xfrm>
-            <a:off x="781633" y="4765618"/>
-            <a:ext cx="4309253" cy="1200329"/>
+            <a:off x="606099" y="4339245"/>
+            <a:ext cx="4309253" cy="1477328"/>
           </a:xfrm>
           <a:prstGeom prst="rect">
             <a:avLst/>
@@ -4949,7 +4949,7 @@
               <a:rPr lang="en-GB" dirty="0">
                 <a:hlinkClick r:id="rId4"/>
               </a:rPr>
-              <a:t>https://github.com/info-zas/zas-robotics-motion/blob/main/01_FoundationProjects/MFL08/MFL08/MFL08.ino</a:t>
+              <a:t>https://github.com/info-zas/zas-robotics-motion/tree/main/01_FoundationProjects/MFL08_Servo_Control_Rotary_Encoder/MFL08_Servo_Control_Rotary_Encoder</a:t>
             </a:r>
             <a:endParaRPr lang="en-GB" dirty="0"/>
           </a:p>
@@ -4960,10 +4960,10 @@
       </p:sp>
       <p:sp>
         <p:nvSpPr>
-          <p:cNvPr id="4" name="TextBox 3">
-            <a:extLst>
-              <a:ext uri="{FF2B5EF4-FFF2-40B4-BE49-F238E27FC236}">
-                <a16:creationId xmlns:a16="http://schemas.microsoft.com/office/drawing/2014/main" id="{04E879C4-DD3D-22CE-DF88-5735CF7FCB6E}"/>
+          <p:cNvPr id="13" name="TextBox 12">
+            <a:extLst>
+              <a:ext uri="{FF2B5EF4-FFF2-40B4-BE49-F238E27FC236}">
+                <a16:creationId xmlns:a16="http://schemas.microsoft.com/office/drawing/2014/main" id="{0A5286FB-EBC3-E77B-547A-B98BE2DE6750}"/>
               </a:ext>
             </a:extLst>
           </p:cNvPr>
@@ -4972,8 +4972,8 @@
         </p:nvSpPr>
         <p:spPr bwMode="auto">
           <a:xfrm>
-            <a:off x="693234" y="4258512"/>
-            <a:ext cx="4157028" cy="369332"/>
+            <a:off x="578981" y="3595421"/>
+            <a:ext cx="4683900" cy="646331"/>
           </a:xfrm>
           <a:prstGeom prst="rect">
             <a:avLst/>
@@ -5085,7 +5085,7 @@
             </a:pPr>
             <a:r>
               <a:rPr lang="en-GB" b="1" dirty="0"/>
-              <a:t>Code for Lesson MFL08 (MFL08.ino):</a:t>
+              <a:t>Code for Lesson MFL08 (MFL08_Servo_Control_Rotary_Encoder.ino):</a:t>
             </a:r>
           </a:p>
         </p:txBody>
